--- a/For System administrators/7. SambaDC/Настройка samba-DC.pptx
+++ b/For System administrators/7. SambaDC/Настройка samba-DC.pptx
@@ -345,7 +345,7 @@
           <a:p>
             <a:fld id="{B4C71EC6-210F-42DE-9C53-41977AD35B3D}" type="datetimeFigureOut">
               <a:rPr lang="ru-RU" smtClean="0"/>
-              <a:t>25.05.2024</a:t>
+              <a:t>17.10.2026</a:t>
             </a:fld>
             <a:endParaRPr lang="ru-RU"/>
           </a:p>
@@ -510,7 +510,7 @@
           <a:p>
             <a:fld id="{B4C71EC6-210F-42DE-9C53-41977AD35B3D}" type="datetimeFigureOut">
               <a:rPr lang="ru-RU" smtClean="0"/>
-              <a:t>25.05.2024</a:t>
+              <a:t>17.10.2026</a:t>
             </a:fld>
             <a:endParaRPr lang="ru-RU"/>
           </a:p>
@@ -685,7 +685,7 @@
           <a:p>
             <a:fld id="{B4C71EC6-210F-42DE-9C53-41977AD35B3D}" type="datetimeFigureOut">
               <a:rPr lang="ru-RU" smtClean="0"/>
-              <a:t>25.05.2024</a:t>
+              <a:t>17.10.2026</a:t>
             </a:fld>
             <a:endParaRPr lang="ru-RU"/>
           </a:p>
@@ -850,7 +850,7 @@
           <a:p>
             <a:fld id="{B4C71EC6-210F-42DE-9C53-41977AD35B3D}" type="datetimeFigureOut">
               <a:rPr lang="ru-RU" smtClean="0"/>
-              <a:t>25.05.2024</a:t>
+              <a:t>17.10.2026</a:t>
             </a:fld>
             <a:endParaRPr lang="ru-RU"/>
           </a:p>
@@ -1091,7 +1091,7 @@
           <a:p>
             <a:fld id="{B4C71EC6-210F-42DE-9C53-41977AD35B3D}" type="datetimeFigureOut">
               <a:rPr lang="ru-RU" smtClean="0"/>
-              <a:t>25.05.2024</a:t>
+              <a:t>17.10.2026</a:t>
             </a:fld>
             <a:endParaRPr lang="ru-RU"/>
           </a:p>
@@ -1374,7 +1374,7 @@
           <a:p>
             <a:fld id="{B4C71EC6-210F-42DE-9C53-41977AD35B3D}" type="datetimeFigureOut">
               <a:rPr lang="ru-RU" smtClean="0"/>
-              <a:t>25.05.2024</a:t>
+              <a:t>17.10.2026</a:t>
             </a:fld>
             <a:endParaRPr lang="ru-RU"/>
           </a:p>
@@ -1791,7 +1791,7 @@
           <a:p>
             <a:fld id="{B4C71EC6-210F-42DE-9C53-41977AD35B3D}" type="datetimeFigureOut">
               <a:rPr lang="ru-RU" smtClean="0"/>
-              <a:t>25.05.2024</a:t>
+              <a:t>17.10.2026</a:t>
             </a:fld>
             <a:endParaRPr lang="ru-RU"/>
           </a:p>
@@ -1904,7 +1904,7 @@
           <a:p>
             <a:fld id="{B4C71EC6-210F-42DE-9C53-41977AD35B3D}" type="datetimeFigureOut">
               <a:rPr lang="ru-RU" smtClean="0"/>
-              <a:t>25.05.2024</a:t>
+              <a:t>17.10.2026</a:t>
             </a:fld>
             <a:endParaRPr lang="ru-RU"/>
           </a:p>
@@ -1994,7 +1994,7 @@
           <a:p>
             <a:fld id="{B4C71EC6-210F-42DE-9C53-41977AD35B3D}" type="datetimeFigureOut">
               <a:rPr lang="ru-RU" smtClean="0"/>
-              <a:t>25.05.2024</a:t>
+              <a:t>17.10.2026</a:t>
             </a:fld>
             <a:endParaRPr lang="ru-RU"/>
           </a:p>
@@ -2266,7 +2266,7 @@
           <a:p>
             <a:fld id="{B4C71EC6-210F-42DE-9C53-41977AD35B3D}" type="datetimeFigureOut">
               <a:rPr lang="ru-RU" smtClean="0"/>
-              <a:t>25.05.2024</a:t>
+              <a:t>17.10.2026</a:t>
             </a:fld>
             <a:endParaRPr lang="ru-RU"/>
           </a:p>
@@ -2514,7 +2514,7 @@
           <a:p>
             <a:fld id="{B4C71EC6-210F-42DE-9C53-41977AD35B3D}" type="datetimeFigureOut">
               <a:rPr lang="ru-RU" smtClean="0"/>
-              <a:t>25.05.2024</a:t>
+              <a:t>17.10.2026</a:t>
             </a:fld>
             <a:endParaRPr lang="ru-RU"/>
           </a:p>
@@ -2722,7 +2722,7 @@
           <a:p>
             <a:fld id="{B4C71EC6-210F-42DE-9C53-41977AD35B3D}" type="datetimeFigureOut">
               <a:rPr lang="ru-RU" smtClean="0"/>
-              <a:t>25.05.2024</a:t>
+              <a:t>17.10.2026</a:t>
             </a:fld>
             <a:endParaRPr lang="ru-RU"/>
           </a:p>
@@ -11832,7 +11832,15 @@
           <a:p>
             <a:r>
               <a:rPr lang="ru-RU" dirty="0" smtClean="0"/>
-              <a:t>По моему опыт проверка не обязательная, но код инструкции я привести был обязан </a:t>
+              <a:t>По моему </a:t>
+            </a:r>
+            <a:r>
+              <a:rPr lang="ru-RU" dirty="0" smtClean="0"/>
+              <a:t>опыту </a:t>
+            </a:r>
+            <a:r>
+              <a:rPr lang="ru-RU" dirty="0" smtClean="0"/>
+              <a:t>проверка не обязательная, но код инструкции я привести был обязан </a:t>
             </a:r>
             <a:r>
               <a:rPr lang="ru-RU" dirty="0" smtClean="0">
